--- a/dist/초5/수학/곱셈과어림/초5_수학_곱셈과어림_02_어림하기_학생용.pptx
+++ b/dist/초5/수학/곱셈과어림/초5_수학_곱셈과어림_02_어림하기_학생용.pptx
@@ -119,13 +119,13 @@
   <p:extLst>
     <p:ext uri="{521415D9-36F7-43E2-AB2F-B90AF26B5E84}">
       <p14:sectionLst xmlns:p14="http://schemas.microsoft.com/office/powerpoint/2010/main">
-        <p14:section name="도입" id="{ea27d6be-2be1-f58a-d412-a3a3aa342b70}">
+        <p14:section name="도입" id="{cdf28dd5-677e-a7b7-72ed-9a6fb5d5ae6a}">
           <p14:sldIdLst>
             <p14:sldId id="256"/>
             <p14:sldId id="257"/>
           </p14:sldIdLst>
         </p14:section>
-        <p14:section name="개념" id="{9c570479-1079-371b-7203-8434c0992c07}">
+        <p14:section name="개념" id="{a242d3df-31f9-e61f-0e0f-11bb87141231}">
           <p14:sldIdLst>
             <p14:sldId id="258"/>
             <p14:sldId id="259"/>
@@ -133,31 +133,31 @@
             <p14:sldId id="263"/>
           </p14:sldIdLst>
         </p14:section>
-        <p14:section name="연습" id="{73df1fe6-aaba-568b-4247-14bd99a371d4}">
+        <p14:section name="연습" id="{ab8a6cb1-3c3b-c970-f7db-a51b974e032e}">
           <p14:sldIdLst>
             <p14:sldId id="261"/>
             <p14:sldId id="262"/>
             <p14:sldId id="264"/>
           </p14:sldIdLst>
         </p14:section>
-        <p14:section name="개념" id="{fbccecdc-8968-4521-79a9-669427da88f0}">
+        <p14:section name="개념" id="{d7a13f7e-84fe-4a47-5210-5cf0032cdafa}">
           <p14:sldIdLst/>
         </p14:section>
-        <p14:section name="연습" id="{f822d6e1-1b35-0dda-3787-269a15981525}">
+        <p14:section name="연습" id="{962a0f8f-a8f3-468c-4d81-ef1f9e634d72}">
           <p14:sldIdLst/>
         </p14:section>
-        <p14:section name="확인" id="{7e07e875-6ec3-c49f-fe1e-95343bf671f3}">
+        <p14:section name="확인" id="{9b7f662e-4ae0-fd42-c7cb-130aaf7e1497}">
           <p14:sldIdLst>
             <p14:sldId id="265"/>
             <p14:sldId id="266"/>
           </p14:sldIdLst>
         </p14:section>
-        <p14:section name="정리" id="{2680aed5-b337-b628-cc43-87d4336e312b}">
+        <p14:section name="정리" id="{8368b936-a099-2c59-cb14-82c88eb7b031}">
           <p14:sldIdLst>
             <p14:sldId id="267"/>
           </p14:sldIdLst>
         </p14:section>
-        <p14:section name="보충" id="{4584ba3e-1259-a274-4c40-62a17e86452c}">
+        <p14:section name="보충" id="{ed7a472f-9f91-60ad-a1a4-c895189fdcc8}">
           <p14:sldIdLst>
             <p14:sldId id="268"/>
           </p14:sldIdLst>
@@ -7694,14 +7694,192 @@
       </p:sp>
       <p:sp>
         <p:nvSpPr>
-          <p:cNvPr id="4" name="S05-figure68" descr="240부터 250까지 수직선: 243은 240으로(버림), 247은 250으로(올림) 가는 화살표"/>
+          <p:cNvPr id="4" name="S05-card68"/>
           <p:cNvSpPr/>
           <p:nvPr/>
         </p:nvSpPr>
         <p:spPr>
           <a:xfrm>
-            <a:off x="2567814" y="4120298"/>
-            <a:ext cx="197934" cy="197934"/>
+            <a:off x="548640" y="5037836"/>
+            <a:ext cx="5431536" cy="1180084"/>
+          </a:xfrm>
+          <a:prstGeom prst="roundRect">
+            <a:avLst>
+              <a:gd name="adj" fmla="val 9298"/>
+            </a:avLst>
+          </a:prstGeom>
+          <a:solidFill>
+            <a:srgbClr val="EAF3F1"/>
+          </a:solidFill>
+          <a:ln w="12700">
+            <a:solidFill>
+              <a:srgbClr val="EAF3F1"/>
+            </a:solidFill>
+            <a:prstDash val="solid"/>
+          </a:ln>
+        </p:spPr>
+      </p:sp>
+      <p:sp>
+        <p:nvSpPr>
+          <p:cNvPr id="5" name="S05-cardtext69"/>
+          <p:cNvSpPr txBox="1"/>
+          <p:nvPr/>
+        </p:nvSpPr>
+        <p:spPr>
+          <a:xfrm>
+            <a:off x="822960" y="5174996"/>
+            <a:ext cx="4882896" cy="905764"/>
+          </a:xfrm>
+          <a:prstGeom prst="rect">
+            <a:avLst/>
+          </a:prstGeom>
+          <a:noFill/>
+          <a:ln/>
+        </p:spPr>
+        <p:txBody>
+          <a:bodyPr wrap="square" lIns="0" tIns="0" rIns="0" bIns="0" rtlCol="0" anchor="ctr"/>
+          <a:lstStyle/>
+          <a:p>
+            <a:pPr eaLnBrk="0" indent="0" marL="0">
+              <a:spcAft>
+                <a:spcPts val="600"/>
+              </a:spcAft>
+              <a:buNone/>
+            </a:pPr>
+            <a:r>
+              <a:rPr lang="ko-KR" altLang="en-US" sz="2800" b="1" dirty="0">
+                <a:solidFill>
+                  <a:srgbClr val="1F2937"/>
+                </a:solidFill>
+                <a:latin typeface="맑은 고딕" pitchFamily="34" charset="0"/>
+                <a:ea typeface="맑은 고딕" pitchFamily="34" charset="-122"/>
+                <a:cs typeface="맑은 고딕" pitchFamily="34" charset="-120"/>
+              </a:rPr>
+              <a:t>0, 1, 2, 3, 4 → 버려요</a:t>
+            </a:r>
+            <a:endParaRPr lang="ko-KR" sz="2800" dirty="0"/>
+          </a:p>
+          <a:p>
+            <a:pPr eaLnBrk="0" indent="0" marL="0">
+              <a:spcAft>
+                <a:spcPts val="600"/>
+              </a:spcAft>
+              <a:buNone/>
+            </a:pPr>
+            <a:r>
+              <a:rPr lang="ko-KR" altLang="en-US" sz="2200" dirty="0">
+                <a:solidFill>
+                  <a:srgbClr val="1F2937"/>
+                </a:solidFill>
+                <a:latin typeface="맑은 고딕" pitchFamily="34" charset="0"/>
+                <a:ea typeface="맑은 고딕" pitchFamily="34" charset="-122"/>
+                <a:cs typeface="맑은 고딕" pitchFamily="34" charset="-120"/>
+              </a:rPr>
+              <a:t>243 → 240</a:t>
+            </a:r>
+            <a:endParaRPr lang="ko-KR" sz="2800" dirty="0"/>
+          </a:p>
+        </p:txBody>
+      </p:sp>
+      <p:sp>
+        <p:nvSpPr>
+          <p:cNvPr id="6" name="S05-card70"/>
+          <p:cNvSpPr/>
+          <p:nvPr/>
+        </p:nvSpPr>
+        <p:spPr>
+          <a:xfrm>
+            <a:off x="6208776" y="5037836"/>
+            <a:ext cx="5431536" cy="1180084"/>
+          </a:xfrm>
+          <a:prstGeom prst="roundRect">
+            <a:avLst>
+              <a:gd name="adj" fmla="val 9298"/>
+            </a:avLst>
+          </a:prstGeom>
+          <a:solidFill>
+            <a:srgbClr val="EAF3F1"/>
+          </a:solidFill>
+          <a:ln w="12700">
+            <a:solidFill>
+              <a:srgbClr val="EAF3F1"/>
+            </a:solidFill>
+            <a:prstDash val="solid"/>
+          </a:ln>
+        </p:spPr>
+      </p:sp>
+      <p:sp>
+        <p:nvSpPr>
+          <p:cNvPr id="7" name="S05-cardtext71"/>
+          <p:cNvSpPr txBox="1"/>
+          <p:nvPr/>
+        </p:nvSpPr>
+        <p:spPr>
+          <a:xfrm>
+            <a:off x="6483096" y="5174996"/>
+            <a:ext cx="4882896" cy="905764"/>
+          </a:xfrm>
+          <a:prstGeom prst="rect">
+            <a:avLst/>
+          </a:prstGeom>
+          <a:noFill/>
+          <a:ln/>
+        </p:spPr>
+        <p:txBody>
+          <a:bodyPr wrap="square" lIns="0" tIns="0" rIns="0" bIns="0" rtlCol="0" anchor="ctr"/>
+          <a:lstStyle/>
+          <a:p>
+            <a:pPr eaLnBrk="0" indent="0" marL="0">
+              <a:spcAft>
+                <a:spcPts val="600"/>
+              </a:spcAft>
+              <a:buNone/>
+            </a:pPr>
+            <a:r>
+              <a:rPr lang="ko-KR" altLang="en-US" sz="2800" b="1" dirty="0">
+                <a:solidFill>
+                  <a:srgbClr val="1F2937"/>
+                </a:solidFill>
+                <a:latin typeface="맑은 고딕" pitchFamily="34" charset="0"/>
+                <a:ea typeface="맑은 고딕" pitchFamily="34" charset="-122"/>
+                <a:cs typeface="맑은 고딕" pitchFamily="34" charset="-120"/>
+              </a:rPr>
+              <a:t>5, 6, 7, 8, 9 → 올려요</a:t>
+            </a:r>
+            <a:endParaRPr lang="ko-KR" sz="2800" dirty="0"/>
+          </a:p>
+          <a:p>
+            <a:pPr eaLnBrk="0" indent="0" marL="0">
+              <a:spcAft>
+                <a:spcPts val="600"/>
+              </a:spcAft>
+              <a:buNone/>
+            </a:pPr>
+            <a:r>
+              <a:rPr lang="ko-KR" altLang="en-US" sz="2200" dirty="0">
+                <a:solidFill>
+                  <a:srgbClr val="1F2937"/>
+                </a:solidFill>
+                <a:latin typeface="맑은 고딕" pitchFamily="34" charset="0"/>
+                <a:ea typeface="맑은 고딕" pitchFamily="34" charset="-122"/>
+                <a:cs typeface="맑은 고딕" pitchFamily="34" charset="-120"/>
+              </a:rPr>
+              <a:t>247 → 250, 245 → 250</a:t>
+            </a:r>
+            <a:endParaRPr lang="ko-KR" sz="2800" dirty="0"/>
+          </a:p>
+        </p:txBody>
+      </p:sp>
+      <p:sp>
+        <p:nvSpPr>
+          <p:cNvPr id="8" name="S05-figure72" descr="240부터 250까지 수직선: 243은 240으로(버림), 247은 250으로(올림) 가는 화살표"/>
+          <p:cNvSpPr/>
+          <p:nvPr/>
+        </p:nvSpPr>
+        <p:spPr>
+          <a:xfrm>
+            <a:off x="4101084" y="3419602"/>
+            <a:ext cx="329184" cy="329184"/>
           </a:xfrm>
           <a:prstGeom prst="ellipse">
             <a:avLst/>
@@ -7719,14 +7897,14 @@
       </p:sp>
       <p:sp>
         <p:nvSpPr>
-          <p:cNvPr id="5" name="S05-mark69"/>
+          <p:cNvPr id="9" name="S05-mark73"/>
           <p:cNvSpPr/>
           <p:nvPr/>
         </p:nvSpPr>
         <p:spPr>
           <a:xfrm>
-            <a:off x="4767079" y="4120298"/>
-            <a:ext cx="197934" cy="197934"/>
+            <a:off x="7758684" y="3419602"/>
+            <a:ext cx="329184" cy="329184"/>
           </a:xfrm>
           <a:prstGeom prst="ellipse">
             <a:avLst/>
@@ -7744,14 +7922,14 @@
       </p:sp>
       <p:sp>
         <p:nvSpPr>
-          <p:cNvPr id="6" name="S05-mark70"/>
+          <p:cNvPr id="10" name="S05-mark74"/>
           <p:cNvSpPr/>
           <p:nvPr/>
         </p:nvSpPr>
         <p:spPr>
           <a:xfrm>
-            <a:off x="632460" y="4219265"/>
-            <a:ext cx="6267907" cy="0"/>
+            <a:off x="882396" y="3584194"/>
+            <a:ext cx="10424160" cy="0"/>
           </a:xfrm>
           <a:prstGeom prst="line">
             <a:avLst/>
@@ -7769,14 +7947,14 @@
       </p:sp>
       <p:sp>
         <p:nvSpPr>
-          <p:cNvPr id="7" name="S05-mark71"/>
+          <p:cNvPr id="11" name="S05-mark75"/>
           <p:cNvSpPr/>
           <p:nvPr/>
         </p:nvSpPr>
         <p:spPr>
           <a:xfrm>
-            <a:off x="1017331" y="4131294"/>
-            <a:ext cx="0" cy="175941"/>
+            <a:off x="1522476" y="3437890"/>
+            <a:ext cx="0" cy="292608"/>
           </a:xfrm>
           <a:prstGeom prst="line">
             <a:avLst/>
@@ -7792,14 +7970,14 @@
       </p:sp>
       <p:sp>
         <p:nvSpPr>
-          <p:cNvPr id="8" name="S05-mark72"/>
+          <p:cNvPr id="12" name="S05-mark76"/>
           <p:cNvSpPr/>
           <p:nvPr/>
         </p:nvSpPr>
         <p:spPr>
           <a:xfrm>
-            <a:off x="1567148" y="4131294"/>
-            <a:ext cx="0" cy="175941"/>
+            <a:off x="2436876" y="3437890"/>
+            <a:ext cx="0" cy="292608"/>
           </a:xfrm>
           <a:prstGeom prst="line">
             <a:avLst/>
@@ -7815,14 +7993,14 @@
       </p:sp>
       <p:sp>
         <p:nvSpPr>
-          <p:cNvPr id="9" name="S05-mark73"/>
+          <p:cNvPr id="13" name="S05-mark77"/>
           <p:cNvSpPr/>
           <p:nvPr/>
         </p:nvSpPr>
         <p:spPr>
           <a:xfrm>
-            <a:off x="2116964" y="4131294"/>
-            <a:ext cx="0" cy="175941"/>
+            <a:off x="3351276" y="3437890"/>
+            <a:ext cx="0" cy="292608"/>
           </a:xfrm>
           <a:prstGeom prst="line">
             <a:avLst/>
@@ -7838,14 +8016,14 @@
       </p:sp>
       <p:sp>
         <p:nvSpPr>
-          <p:cNvPr id="10" name="S05-mark74"/>
+          <p:cNvPr id="14" name="S05-mark78"/>
           <p:cNvSpPr/>
           <p:nvPr/>
         </p:nvSpPr>
         <p:spPr>
           <a:xfrm>
-            <a:off x="2666781" y="4131294"/>
-            <a:ext cx="0" cy="175941"/>
+            <a:off x="4265676" y="3437890"/>
+            <a:ext cx="0" cy="292608"/>
           </a:xfrm>
           <a:prstGeom prst="line">
             <a:avLst/>
@@ -7861,14 +8039,14 @@
       </p:sp>
       <p:sp>
         <p:nvSpPr>
-          <p:cNvPr id="11" name="S05-mark75"/>
+          <p:cNvPr id="15" name="S05-mark79"/>
           <p:cNvSpPr/>
           <p:nvPr/>
         </p:nvSpPr>
         <p:spPr>
           <a:xfrm>
-            <a:off x="3216597" y="4131294"/>
-            <a:ext cx="0" cy="175941"/>
+            <a:off x="5180076" y="3437890"/>
+            <a:ext cx="0" cy="292608"/>
           </a:xfrm>
           <a:prstGeom prst="line">
             <a:avLst/>
@@ -7884,14 +8062,14 @@
       </p:sp>
       <p:sp>
         <p:nvSpPr>
-          <p:cNvPr id="12" name="S05-mark76"/>
+          <p:cNvPr id="16" name="S05-mark80"/>
           <p:cNvSpPr/>
           <p:nvPr/>
         </p:nvSpPr>
         <p:spPr>
           <a:xfrm>
-            <a:off x="3766414" y="4131294"/>
-            <a:ext cx="0" cy="175941"/>
+            <a:off x="6094476" y="3437890"/>
+            <a:ext cx="0" cy="292608"/>
           </a:xfrm>
           <a:prstGeom prst="line">
             <a:avLst/>
@@ -7907,14 +8085,14 @@
       </p:sp>
       <p:sp>
         <p:nvSpPr>
-          <p:cNvPr id="13" name="S05-mark77"/>
+          <p:cNvPr id="17" name="S05-mark81"/>
           <p:cNvSpPr/>
           <p:nvPr/>
         </p:nvSpPr>
         <p:spPr>
           <a:xfrm>
-            <a:off x="4316230" y="4131294"/>
-            <a:ext cx="0" cy="175941"/>
+            <a:off x="7008876" y="3437890"/>
+            <a:ext cx="0" cy="292608"/>
           </a:xfrm>
           <a:prstGeom prst="line">
             <a:avLst/>
@@ -7930,14 +8108,14 @@
       </p:sp>
       <p:sp>
         <p:nvSpPr>
-          <p:cNvPr id="14" name="S05-mark78"/>
+          <p:cNvPr id="18" name="S05-mark82"/>
           <p:cNvSpPr/>
           <p:nvPr/>
         </p:nvSpPr>
         <p:spPr>
           <a:xfrm>
-            <a:off x="4866046" y="4131294"/>
-            <a:ext cx="0" cy="175941"/>
+            <a:off x="7923276" y="3437890"/>
+            <a:ext cx="0" cy="292608"/>
           </a:xfrm>
           <a:prstGeom prst="line">
             <a:avLst/>
@@ -7953,14 +8131,14 @@
       </p:sp>
       <p:sp>
         <p:nvSpPr>
-          <p:cNvPr id="15" name="S05-mark79"/>
+          <p:cNvPr id="19" name="S05-mark83"/>
           <p:cNvSpPr/>
           <p:nvPr/>
         </p:nvSpPr>
         <p:spPr>
           <a:xfrm>
-            <a:off x="5415863" y="4131294"/>
-            <a:ext cx="0" cy="175941"/>
+            <a:off x="8837676" y="3437890"/>
+            <a:ext cx="0" cy="292608"/>
           </a:xfrm>
           <a:prstGeom prst="line">
             <a:avLst/>
@@ -7976,14 +8154,14 @@
       </p:sp>
       <p:sp>
         <p:nvSpPr>
-          <p:cNvPr id="16" name="S05-mark80"/>
+          <p:cNvPr id="20" name="S05-mark84"/>
           <p:cNvSpPr/>
           <p:nvPr/>
         </p:nvSpPr>
         <p:spPr>
           <a:xfrm>
-            <a:off x="5965679" y="4131294"/>
-            <a:ext cx="0" cy="175941"/>
+            <a:off x="9752076" y="3437890"/>
+            <a:ext cx="0" cy="292608"/>
           </a:xfrm>
           <a:prstGeom prst="line">
             <a:avLst/>
@@ -7999,14 +8177,14 @@
       </p:sp>
       <p:sp>
         <p:nvSpPr>
-          <p:cNvPr id="17" name="S05-mark81"/>
+          <p:cNvPr id="21" name="S05-mark85"/>
           <p:cNvSpPr/>
           <p:nvPr/>
         </p:nvSpPr>
         <p:spPr>
           <a:xfrm>
-            <a:off x="6515496" y="4131294"/>
-            <a:ext cx="0" cy="175941"/>
+            <a:off x="10666476" y="3437890"/>
+            <a:ext cx="0" cy="292608"/>
           </a:xfrm>
           <a:prstGeom prst="line">
             <a:avLst/>
@@ -8022,14 +8200,14 @@
       </p:sp>
       <p:sp>
         <p:nvSpPr>
-          <p:cNvPr id="18" name="S05-mark82"/>
+          <p:cNvPr id="22" name="S05-mark86"/>
           <p:cNvSpPr/>
           <p:nvPr/>
         </p:nvSpPr>
         <p:spPr>
           <a:xfrm flipV="1">
-            <a:off x="2666781" y="3878379"/>
-            <a:ext cx="0" cy="203432"/>
+            <a:off x="4265676" y="3017266"/>
+            <a:ext cx="0" cy="338328"/>
           </a:xfrm>
           <a:prstGeom prst="line">
             <a:avLst/>
@@ -8045,14 +8223,14 @@
       </p:sp>
       <p:sp>
         <p:nvSpPr>
-          <p:cNvPr id="19" name="S05-mark83"/>
+          <p:cNvPr id="23" name="S05-mark87"/>
           <p:cNvSpPr/>
           <p:nvPr/>
         </p:nvSpPr>
         <p:spPr>
           <a:xfrm flipH="1">
-            <a:off x="1017331" y="3878379"/>
-            <a:ext cx="1649449" cy="0"/>
+            <a:off x="1522476" y="3017266"/>
+            <a:ext cx="2743200" cy="0"/>
           </a:xfrm>
           <a:prstGeom prst="line">
             <a:avLst/>
@@ -8069,14 +8247,14 @@
       </p:sp>
       <p:sp>
         <p:nvSpPr>
-          <p:cNvPr id="20" name="S05-mark84"/>
+          <p:cNvPr id="24" name="S05-mark88"/>
           <p:cNvSpPr/>
           <p:nvPr/>
         </p:nvSpPr>
         <p:spPr>
           <a:xfrm flipV="1">
-            <a:off x="4866046" y="3878379"/>
-            <a:ext cx="0" cy="203432"/>
+            <a:off x="7923276" y="3017266"/>
+            <a:ext cx="0" cy="338328"/>
           </a:xfrm>
           <a:prstGeom prst="line">
             <a:avLst/>
@@ -8092,14 +8270,14 @@
       </p:sp>
       <p:sp>
         <p:nvSpPr>
-          <p:cNvPr id="21" name="S05-mark85"/>
+          <p:cNvPr id="25" name="S05-mark89"/>
           <p:cNvSpPr/>
           <p:nvPr/>
         </p:nvSpPr>
         <p:spPr>
           <a:xfrm>
-            <a:off x="4866046" y="3878379"/>
-            <a:ext cx="1649449" cy="0"/>
+            <a:off x="7923276" y="3017266"/>
+            <a:ext cx="2743200" cy="0"/>
           </a:xfrm>
           <a:prstGeom prst="line">
             <a:avLst/>
@@ -8116,13 +8294,13 @@
       </p:sp>
       <p:sp>
         <p:nvSpPr>
-          <p:cNvPr id="22" name="S05-label87"/>
+          <p:cNvPr id="26" name="S05-label91"/>
           <p:cNvSpPr txBox="1"/>
           <p:nvPr/>
         </p:nvSpPr>
         <p:spPr>
           <a:xfrm>
-            <a:off x="685861" y="4440508"/>
+            <a:off x="1191006" y="4067937"/>
             <a:ext cx="662940" cy="349250"/>
           </a:xfrm>
           <a:prstGeom prst="rect">
@@ -8155,13 +8333,13 @@
       </p:sp>
       <p:sp>
         <p:nvSpPr>
-          <p:cNvPr id="23" name="S05-label89"/>
+          <p:cNvPr id="27" name="S05-label93"/>
           <p:cNvSpPr txBox="1"/>
           <p:nvPr/>
         </p:nvSpPr>
         <p:spPr>
           <a:xfrm>
-            <a:off x="3434944" y="4440508"/>
+            <a:off x="5763006" y="4067937"/>
             <a:ext cx="662940" cy="349250"/>
           </a:xfrm>
           <a:prstGeom prst="rect">
@@ -8194,13 +8372,13 @@
       </p:sp>
       <p:sp>
         <p:nvSpPr>
-          <p:cNvPr id="24" name="S05-label91"/>
+          <p:cNvPr id="28" name="S05-label95"/>
           <p:cNvSpPr txBox="1"/>
           <p:nvPr/>
         </p:nvSpPr>
         <p:spPr>
           <a:xfrm>
-            <a:off x="6184026" y="4440508"/>
+            <a:off x="10335006" y="4067937"/>
             <a:ext cx="662940" cy="349250"/>
           </a:xfrm>
           <a:prstGeom prst="rect">
@@ -8233,13 +8411,13 @@
       </p:sp>
       <p:sp>
         <p:nvSpPr>
-          <p:cNvPr id="25" name="S05-label93"/>
+          <p:cNvPr id="29" name="S05-label97"/>
           <p:cNvSpPr txBox="1"/>
           <p:nvPr/>
         </p:nvSpPr>
         <p:spPr>
           <a:xfrm>
-            <a:off x="2335311" y="4440508"/>
+            <a:off x="3934206" y="4067937"/>
             <a:ext cx="662940" cy="349250"/>
           </a:xfrm>
           <a:prstGeom prst="rect">
@@ -8272,13 +8450,13 @@
       </p:sp>
       <p:sp>
         <p:nvSpPr>
-          <p:cNvPr id="26" name="S05-label95"/>
+          <p:cNvPr id="30" name="S05-label99"/>
           <p:cNvSpPr txBox="1"/>
           <p:nvPr/>
         </p:nvSpPr>
         <p:spPr>
           <a:xfrm>
-            <a:off x="4534576" y="4440508"/>
+            <a:off x="7591806" y="4067937"/>
             <a:ext cx="662940" cy="349250"/>
           </a:xfrm>
           <a:prstGeom prst="rect">
@@ -8311,13 +8489,13 @@
       </p:sp>
       <p:sp>
         <p:nvSpPr>
-          <p:cNvPr id="27" name="S05-label97"/>
+          <p:cNvPr id="31" name="S05-label101"/>
           <p:cNvSpPr txBox="1"/>
           <p:nvPr/>
         </p:nvSpPr>
         <p:spPr>
           <a:xfrm>
-            <a:off x="1513380" y="3439842"/>
+            <a:off x="2565400" y="2403729"/>
             <a:ext cx="657352" cy="349250"/>
           </a:xfrm>
           <a:prstGeom prst="rect">
@@ -8350,13 +8528,13 @@
       </p:sp>
       <p:sp>
         <p:nvSpPr>
-          <p:cNvPr id="28" name="S05-label99"/>
+          <p:cNvPr id="32" name="S05-label103"/>
           <p:cNvSpPr txBox="1"/>
           <p:nvPr/>
         </p:nvSpPr>
         <p:spPr>
           <a:xfrm>
-            <a:off x="5362095" y="3439842"/>
+            <a:off x="8966200" y="2403729"/>
             <a:ext cx="657352" cy="349250"/>
           </a:xfrm>
           <a:prstGeom prst="rect">
@@ -8384,184 +8562,6 @@
               <a:t>올림</a:t>
             </a:r>
             <a:endParaRPr lang="ko-KR" sz="2200" dirty="0"/>
-          </a:p>
-        </p:txBody>
-      </p:sp>
-      <p:sp>
-        <p:nvSpPr>
-          <p:cNvPr id="29" name="S05-card100"/>
-          <p:cNvSpPr/>
-          <p:nvPr/>
-        </p:nvSpPr>
-        <p:spPr>
-          <a:xfrm>
-            <a:off x="7349947" y="2386584"/>
-            <a:ext cx="4290365" cy="1613916"/>
-          </a:xfrm>
-          <a:prstGeom prst="roundRect">
-            <a:avLst>
-              <a:gd name="adj" fmla="val 6799"/>
-            </a:avLst>
-          </a:prstGeom>
-          <a:solidFill>
-            <a:srgbClr val="EAF3F1"/>
-          </a:solidFill>
-          <a:ln w="12700">
-            <a:solidFill>
-              <a:srgbClr val="EAF3F1"/>
-            </a:solidFill>
-            <a:prstDash val="solid"/>
-          </a:ln>
-        </p:spPr>
-      </p:sp>
-      <p:sp>
-        <p:nvSpPr>
-          <p:cNvPr id="30" name="S05-cardtext101"/>
-          <p:cNvSpPr txBox="1"/>
-          <p:nvPr/>
-        </p:nvSpPr>
-        <p:spPr>
-          <a:xfrm>
-            <a:off x="7624267" y="2523744"/>
-            <a:ext cx="3741725" cy="1339596"/>
-          </a:xfrm>
-          <a:prstGeom prst="rect">
-            <a:avLst/>
-          </a:prstGeom>
-          <a:noFill/>
-          <a:ln/>
-        </p:spPr>
-        <p:txBody>
-          <a:bodyPr wrap="square" lIns="0" tIns="0" rIns="0" bIns="0" rtlCol="0" anchor="ctr"/>
-          <a:lstStyle/>
-          <a:p>
-            <a:pPr eaLnBrk="0" indent="0" marL="0">
-              <a:spcAft>
-                <a:spcPts val="600"/>
-              </a:spcAft>
-              <a:buNone/>
-            </a:pPr>
-            <a:r>
-              <a:rPr lang="ko-KR" altLang="en-US" sz="2800" b="1" dirty="0">
-                <a:solidFill>
-                  <a:srgbClr val="1F2937"/>
-                </a:solidFill>
-                <a:latin typeface="맑은 고딕" pitchFamily="34" charset="0"/>
-                <a:ea typeface="맑은 고딕" pitchFamily="34" charset="-122"/>
-                <a:cs typeface="맑은 고딕" pitchFamily="34" charset="-120"/>
-              </a:rPr>
-              <a:t>0, 1, 2, 3, 4 → 버려요</a:t>
-            </a:r>
-            <a:endParaRPr lang="ko-KR" sz="2800" dirty="0"/>
-          </a:p>
-          <a:p>
-            <a:pPr eaLnBrk="0" indent="0" marL="0">
-              <a:spcAft>
-                <a:spcPts val="600"/>
-              </a:spcAft>
-              <a:buNone/>
-            </a:pPr>
-            <a:r>
-              <a:rPr lang="ko-KR" altLang="en-US" sz="2200" dirty="0">
-                <a:solidFill>
-                  <a:srgbClr val="1F2937"/>
-                </a:solidFill>
-                <a:latin typeface="맑은 고딕" pitchFamily="34" charset="0"/>
-                <a:ea typeface="맑은 고딕" pitchFamily="34" charset="-122"/>
-                <a:cs typeface="맑은 고딕" pitchFamily="34" charset="-120"/>
-              </a:rPr>
-              <a:t>243 → 240</a:t>
-            </a:r>
-            <a:endParaRPr lang="ko-KR" sz="2800" dirty="0"/>
-          </a:p>
-        </p:txBody>
-      </p:sp>
-      <p:sp>
-        <p:nvSpPr>
-          <p:cNvPr id="31" name="S05-card102"/>
-          <p:cNvSpPr/>
-          <p:nvPr/>
-        </p:nvSpPr>
-        <p:spPr>
-          <a:xfrm>
-            <a:off x="7349947" y="4229100"/>
-            <a:ext cx="4290365" cy="1613916"/>
-          </a:xfrm>
-          <a:prstGeom prst="roundRect">
-            <a:avLst>
-              <a:gd name="adj" fmla="val 6799"/>
-            </a:avLst>
-          </a:prstGeom>
-          <a:solidFill>
-            <a:srgbClr val="EAF3F1"/>
-          </a:solidFill>
-          <a:ln w="12700">
-            <a:solidFill>
-              <a:srgbClr val="EAF3F1"/>
-            </a:solidFill>
-            <a:prstDash val="solid"/>
-          </a:ln>
-        </p:spPr>
-      </p:sp>
-      <p:sp>
-        <p:nvSpPr>
-          <p:cNvPr id="32" name="S05-cardtext103"/>
-          <p:cNvSpPr txBox="1"/>
-          <p:nvPr/>
-        </p:nvSpPr>
-        <p:spPr>
-          <a:xfrm>
-            <a:off x="7624267" y="4366260"/>
-            <a:ext cx="3741725" cy="1339596"/>
-          </a:xfrm>
-          <a:prstGeom prst="rect">
-            <a:avLst/>
-          </a:prstGeom>
-          <a:noFill/>
-          <a:ln/>
-        </p:spPr>
-        <p:txBody>
-          <a:bodyPr wrap="square" lIns="0" tIns="0" rIns="0" bIns="0" rtlCol="0" anchor="ctr"/>
-          <a:lstStyle/>
-          <a:p>
-            <a:pPr eaLnBrk="0" indent="0" marL="0">
-              <a:spcAft>
-                <a:spcPts val="600"/>
-              </a:spcAft>
-              <a:buNone/>
-            </a:pPr>
-            <a:r>
-              <a:rPr lang="ko-KR" altLang="en-US" sz="2800" b="1" dirty="0">
-                <a:solidFill>
-                  <a:srgbClr val="1F2937"/>
-                </a:solidFill>
-                <a:latin typeface="맑은 고딕" pitchFamily="34" charset="0"/>
-                <a:ea typeface="맑은 고딕" pitchFamily="34" charset="-122"/>
-                <a:cs typeface="맑은 고딕" pitchFamily="34" charset="-120"/>
-              </a:rPr>
-              <a:t>5, 6, 7, 8, 9 → 올려요</a:t>
-            </a:r>
-            <a:endParaRPr lang="ko-KR" sz="2800" dirty="0"/>
-          </a:p>
-          <a:p>
-            <a:pPr eaLnBrk="0" indent="0" marL="0">
-              <a:spcAft>
-                <a:spcPts val="600"/>
-              </a:spcAft>
-              <a:buNone/>
-            </a:pPr>
-            <a:r>
-              <a:rPr lang="ko-KR" altLang="en-US" sz="2200" dirty="0">
-                <a:solidFill>
-                  <a:srgbClr val="1F2937"/>
-                </a:solidFill>
-                <a:latin typeface="맑은 고딕" pitchFamily="34" charset="0"/>
-                <a:ea typeface="맑은 고딕" pitchFamily="34" charset="-122"/>
-                <a:cs typeface="맑은 고딕" pitchFamily="34" charset="-120"/>
-              </a:rPr>
-              <a:t>247 → 250, 245 → 250</a:t>
-            </a:r>
-            <a:endParaRPr lang="ko-KR" sz="2800" dirty="0"/>
           </a:p>
         </p:txBody>
       </p:sp>
